--- a/canva/kenshu-1page.pptx
+++ b/canva/kenshu-1page.pptx
@@ -883,8 +883,8 @@
         </p:nvSpPr>
         <p:spPr>
           <a:xfrm>
-            <a:off x="320040" y="201168"/>
-            <a:ext cx="6035040" cy="502920"/>
+            <a:off x="228600" y="109728"/>
+            <a:ext cx="5806440" cy="493776"/>
           </a:xfrm>
           <a:prstGeom prst="rect">
             <a:avLst/>
@@ -900,7 +900,7 @@
               <a:buNone/>
             </a:pPr>
             <a:r>
-              <a:rPr lang="en-US" sz="2900" b="1" dirty="0">
+              <a:rPr lang="en-US" sz="2400" b="1" dirty="0">
                 <a:solidFill>
                   <a:srgbClr val="E65100"/>
                 </a:solidFill>
@@ -910,7 +910,7 @@
               </a:rPr>
               <a:t>わくわく! あきの おもちゃづくり</a:t>
             </a:r>
-            <a:endParaRPr lang="en-US" sz="2900" dirty="0"/>
+            <a:endParaRPr lang="en-US" sz="2400" dirty="0"/>
           </a:p>
         </p:txBody>
       </p:sp>
@@ -922,8 +922,8 @@
         </p:nvSpPr>
         <p:spPr>
           <a:xfrm>
-            <a:off x="347472" y="694944"/>
-            <a:ext cx="6035040" cy="292608"/>
+            <a:off x="5440680" y="128016"/>
+            <a:ext cx="2103120" cy="457200"/>
           </a:xfrm>
           <a:prstGeom prst="rect">
             <a:avLst/>
@@ -935,11 +935,14 @@
           <a:bodyPr wrap="square" lIns="0" tIns="0" rIns="0" bIns="0" rtlCol="0" anchor="ctr"/>
           <a:lstStyle/>
           <a:p>
-            <a:pPr algn="l" indent="0" marL="0">
+            <a:pPr algn="r" indent="0" marL="0">
+              <a:lnSpc>
+                <a:spcPct val="115000"/>
+              </a:lnSpc>
               <a:buNone/>
             </a:pPr>
             <a:r>
-              <a:rPr lang="en-US" sz="1300" dirty="0">
+              <a:rPr lang="en-US" sz="950" dirty="0">
                 <a:solidFill>
                   <a:srgbClr val="8D6E63"/>
                 </a:solidFill>
@@ -947,9 +950,29 @@
                 <a:ea typeface="Zen Maru Gothic" pitchFamily="34" charset="-122"/>
                 <a:cs typeface="Zen Maru Gothic" pitchFamily="34" charset="-120"/>
               </a:rPr>
-              <a:t>生活科「あきと あそぼう」1年生 ／ Canvaテンプレート（全13ページ）</a:t>
-            </a:r>
-            <a:endParaRPr lang="en-US" sz="1300" dirty="0"/>
+              <a:t>生活科「あきと あそぼう」1年生</a:t>
+            </a:r>
+            <a:endParaRPr lang="en-US" sz="950" dirty="0"/>
+          </a:p>
+          <a:p>
+            <a:pPr algn="r" indent="0" marL="0">
+              <a:lnSpc>
+                <a:spcPct val="115000"/>
+              </a:lnSpc>
+              <a:buNone/>
+            </a:pPr>
+            <a:r>
+              <a:rPr lang="en-US" sz="950" dirty="0">
+                <a:solidFill>
+                  <a:srgbClr val="8D6E63"/>
+                </a:solidFill>
+                <a:latin typeface="Zen Maru Gothic" pitchFamily="34" charset="0"/>
+                <a:ea typeface="Zen Maru Gothic" pitchFamily="34" charset="-122"/>
+                <a:cs typeface="Zen Maru Gothic" pitchFamily="34" charset="-120"/>
+              </a:rPr>
+              <a:t>Canvaテンプレート 全13ページ</a:t>
+            </a:r>
+            <a:endParaRPr lang="en-US" sz="950" dirty="0"/>
           </a:p>
         </p:txBody>
       </p:sp>
@@ -961,12 +984,12 @@
         </p:nvSpPr>
         <p:spPr>
           <a:xfrm>
-            <a:off x="6537960" y="219456"/>
-            <a:ext cx="2286000" cy="658368"/>
+            <a:off x="7635240" y="118872"/>
+            <a:ext cx="1280160" cy="475488"/>
           </a:xfrm>
           <a:prstGeom prst="roundRect">
             <a:avLst>
-              <a:gd name="adj" fmla="val 19444"/>
+              <a:gd name="adj" fmla="val 23077"/>
             </a:avLst>
           </a:prstGeom>
           <a:solidFill>
@@ -988,8 +1011,8 @@
         </p:nvSpPr>
         <p:spPr>
           <a:xfrm>
-            <a:off x="6537960" y="219456"/>
-            <a:ext cx="2286000" cy="658368"/>
+            <a:off x="7635240" y="118872"/>
+            <a:ext cx="1280160" cy="475488"/>
           </a:xfrm>
           <a:prstGeom prst="rect">
             <a:avLst/>
@@ -1003,12 +1026,12 @@
           <a:p>
             <a:pPr algn="ctr" indent="0" marL="0">
               <a:lnSpc>
-                <a:spcPct val="110000"/>
+                <a:spcPct val="105000"/>
               </a:lnSpc>
               <a:buNone/>
             </a:pPr>
             <a:r>
-              <a:rPr lang="en-US" sz="1400" b="1" dirty="0">
+              <a:rPr lang="en-US" sz="900" b="1" dirty="0">
                 <a:solidFill>
                   <a:srgbClr val="E65100"/>
                 </a:solidFill>
@@ -1018,17 +1041,17 @@
               </a:rPr>
               <a:t>もじを うたずに</a:t>
             </a:r>
-            <a:endParaRPr lang="en-US" sz="1400" dirty="0"/>
+            <a:endParaRPr lang="en-US" sz="900" dirty="0"/>
           </a:p>
           <a:p>
             <a:pPr algn="ctr" indent="0" marL="0">
               <a:lnSpc>
-                <a:spcPct val="110000"/>
+                <a:spcPct val="105000"/>
               </a:lnSpc>
               <a:buNone/>
             </a:pPr>
             <a:r>
-              <a:rPr lang="en-US" sz="1400" b="1" dirty="0">
+              <a:rPr lang="en-US" sz="900" b="1" dirty="0">
                 <a:solidFill>
                   <a:srgbClr val="E65100"/>
                 </a:solidFill>
@@ -1038,7 +1061,7 @@
               </a:rPr>
               <a:t>1年生が つくれる</a:t>
             </a:r>
-            <a:endParaRPr lang="en-US" sz="1400" dirty="0"/>
+            <a:endParaRPr lang="en-US" sz="900" dirty="0"/>
           </a:p>
         </p:txBody>
       </p:sp>
@@ -1050,18 +1073,18 @@
         </p:nvSpPr>
         <p:spPr>
           <a:xfrm>
-            <a:off x="265176" y="1709928"/>
-            <a:ext cx="4041648" cy="640080"/>
+            <a:off x="164592" y="1721587"/>
+            <a:ext cx="7062826" cy="1072363"/>
           </a:xfrm>
           <a:prstGeom prst="roundRect">
             <a:avLst>
-              <a:gd name="adj" fmla="val 11429"/>
+              <a:gd name="adj" fmla="val 8527"/>
             </a:avLst>
           </a:prstGeom>
           <a:solidFill>
-            <a:srgbClr val="FFF3E0"/>
-          </a:solidFill>
-          <a:ln w="25400">
+            <a:srgbClr val="FFF6E5"/>
+          </a:solidFill>
+          <a:ln w="31750">
             <a:solidFill>
               <a:srgbClr val="FB8C00"/>
             </a:solidFill>
@@ -1085,8 +1108,8 @@
         </p:blipFill>
         <p:spPr>
           <a:xfrm>
-            <a:off x="320040" y="1143000"/>
-            <a:ext cx="941832" cy="530352"/>
+            <a:off x="228600" y="749808"/>
+            <a:ext cx="1678838" cy="944347"/>
           </a:xfrm>
           <a:prstGeom prst="rect">
             <a:avLst/>
@@ -1101,8 +1124,8 @@
         </p:nvSpPr>
         <p:spPr>
           <a:xfrm>
-            <a:off x="338328" y="1161288"/>
-            <a:ext cx="173736" cy="173736"/>
+            <a:off x="274320" y="795528"/>
+            <a:ext cx="292608" cy="292608"/>
           </a:xfrm>
           <a:prstGeom prst="ellipse">
             <a:avLst/>
@@ -1110,9 +1133,9 @@
           <a:solidFill>
             <a:srgbClr val="FFFFFF"/>
           </a:solidFill>
-          <a:ln w="9525">
+          <a:ln w="12700">
             <a:solidFill>
-              <a:srgbClr val="BDBDBD"/>
+              <a:srgbClr val="9E9E9E"/>
             </a:solidFill>
             <a:prstDash val="solid"/>
           </a:ln>
@@ -1126,8 +1149,8 @@
         </p:nvSpPr>
         <p:spPr>
           <a:xfrm>
-            <a:off x="338328" y="1165860"/>
-            <a:ext cx="173736" cy="164592"/>
+            <a:off x="274320" y="804672"/>
+            <a:ext cx="292608" cy="274320"/>
           </a:xfrm>
           <a:prstGeom prst="rect">
             <a:avLst/>
@@ -1143,9 +1166,9 @@
               <a:buNone/>
             </a:pPr>
             <a:r>
-              <a:rPr lang="en-US" sz="800" b="1" dirty="0">
+              <a:rPr lang="en-US" sz="1300" b="1" dirty="0">
                 <a:solidFill>
-                  <a:srgbClr val="616161"/>
+                  <a:srgbClr val="424242"/>
                 </a:solidFill>
                 <a:latin typeface="Zen Maru Gothic" pitchFamily="34" charset="0"/>
                 <a:ea typeface="Zen Maru Gothic" pitchFamily="34" charset="-122"/>
@@ -1153,7 +1176,7 @@
               </a:rPr>
               <a:t>1</a:t>
             </a:r>
-            <a:endParaRPr lang="en-US" sz="800" dirty="0"/>
+            <a:endParaRPr lang="en-US" sz="1300" dirty="0"/>
           </a:p>
         </p:txBody>
       </p:sp>
@@ -1173,8 +1196,8 @@
         </p:blipFill>
         <p:spPr>
           <a:xfrm>
-            <a:off x="1316736" y="1143000"/>
-            <a:ext cx="941832" cy="530352"/>
+            <a:off x="1980590" y="749808"/>
+            <a:ext cx="1678838" cy="944347"/>
           </a:xfrm>
           <a:prstGeom prst="rect">
             <a:avLst/>
@@ -1189,8 +1212,8 @@
         </p:nvSpPr>
         <p:spPr>
           <a:xfrm>
-            <a:off x="1335024" y="1161288"/>
-            <a:ext cx="173736" cy="173736"/>
+            <a:off x="2026310" y="795528"/>
+            <a:ext cx="292608" cy="292608"/>
           </a:xfrm>
           <a:prstGeom prst="ellipse">
             <a:avLst/>
@@ -1198,9 +1221,9 @@
           <a:solidFill>
             <a:srgbClr val="FFFFFF"/>
           </a:solidFill>
-          <a:ln w="9525">
+          <a:ln w="12700">
             <a:solidFill>
-              <a:srgbClr val="BDBDBD"/>
+              <a:srgbClr val="9E9E9E"/>
             </a:solidFill>
             <a:prstDash val="solid"/>
           </a:ln>
@@ -1214,8 +1237,8 @@
         </p:nvSpPr>
         <p:spPr>
           <a:xfrm>
-            <a:off x="1335024" y="1165860"/>
-            <a:ext cx="173736" cy="164592"/>
+            <a:off x="2026310" y="804672"/>
+            <a:ext cx="292608" cy="274320"/>
           </a:xfrm>
           <a:prstGeom prst="rect">
             <a:avLst/>
@@ -1231,9 +1254,9 @@
               <a:buNone/>
             </a:pPr>
             <a:r>
-              <a:rPr lang="en-US" sz="800" b="1" dirty="0">
+              <a:rPr lang="en-US" sz="1300" b="1" dirty="0">
                 <a:solidFill>
-                  <a:srgbClr val="616161"/>
+                  <a:srgbClr val="424242"/>
                 </a:solidFill>
                 <a:latin typeface="Zen Maru Gothic" pitchFamily="34" charset="0"/>
                 <a:ea typeface="Zen Maru Gothic" pitchFamily="34" charset="-122"/>
@@ -1241,7 +1264,7 @@
               </a:rPr>
               <a:t>2</a:t>
             </a:r>
-            <a:endParaRPr lang="en-US" sz="800" dirty="0"/>
+            <a:endParaRPr lang="en-US" sz="1300" dirty="0"/>
           </a:p>
         </p:txBody>
       </p:sp>
@@ -1261,8 +1284,8 @@
         </p:blipFill>
         <p:spPr>
           <a:xfrm>
-            <a:off x="2313432" y="1143000"/>
-            <a:ext cx="941832" cy="530352"/>
+            <a:off x="3732581" y="749808"/>
+            <a:ext cx="1678838" cy="944347"/>
           </a:xfrm>
           <a:prstGeom prst="rect">
             <a:avLst/>
@@ -1277,8 +1300,8 @@
         </p:nvSpPr>
         <p:spPr>
           <a:xfrm>
-            <a:off x="2331720" y="1161288"/>
-            <a:ext cx="173736" cy="173736"/>
+            <a:off x="3778301" y="795528"/>
+            <a:ext cx="292608" cy="292608"/>
           </a:xfrm>
           <a:prstGeom prst="ellipse">
             <a:avLst/>
@@ -1286,9 +1309,9 @@
           <a:solidFill>
             <a:srgbClr val="FFFFFF"/>
           </a:solidFill>
-          <a:ln w="9525">
+          <a:ln w="12700">
             <a:solidFill>
-              <a:srgbClr val="BDBDBD"/>
+              <a:srgbClr val="9E9E9E"/>
             </a:solidFill>
             <a:prstDash val="solid"/>
           </a:ln>
@@ -1302,8 +1325,8 @@
         </p:nvSpPr>
         <p:spPr>
           <a:xfrm>
-            <a:off x="2331720" y="1165860"/>
-            <a:ext cx="173736" cy="164592"/>
+            <a:off x="3778301" y="804672"/>
+            <a:ext cx="292608" cy="274320"/>
           </a:xfrm>
           <a:prstGeom prst="rect">
             <a:avLst/>
@@ -1319,9 +1342,9 @@
               <a:buNone/>
             </a:pPr>
             <a:r>
-              <a:rPr lang="en-US" sz="800" b="1" dirty="0">
+              <a:rPr lang="en-US" sz="1300" b="1" dirty="0">
                 <a:solidFill>
-                  <a:srgbClr val="616161"/>
+                  <a:srgbClr val="424242"/>
                 </a:solidFill>
                 <a:latin typeface="Zen Maru Gothic" pitchFamily="34" charset="0"/>
                 <a:ea typeface="Zen Maru Gothic" pitchFamily="34" charset="-122"/>
@@ -1329,7 +1352,7 @@
               </a:rPr>
               <a:t>3</a:t>
             </a:r>
-            <a:endParaRPr lang="en-US" sz="800" dirty="0"/>
+            <a:endParaRPr lang="en-US" sz="1300" dirty="0"/>
           </a:p>
         </p:txBody>
       </p:sp>
@@ -1349,8 +1372,8 @@
         </p:blipFill>
         <p:spPr>
           <a:xfrm>
-            <a:off x="3310128" y="1143000"/>
-            <a:ext cx="941832" cy="530352"/>
+            <a:off x="5484571" y="749808"/>
+            <a:ext cx="1678838" cy="944347"/>
           </a:xfrm>
           <a:prstGeom prst="rect">
             <a:avLst/>
@@ -1365,8 +1388,8 @@
         </p:nvSpPr>
         <p:spPr>
           <a:xfrm>
-            <a:off x="3328416" y="1161288"/>
-            <a:ext cx="173736" cy="173736"/>
+            <a:off x="5530291" y="795528"/>
+            <a:ext cx="292608" cy="292608"/>
           </a:xfrm>
           <a:prstGeom prst="ellipse">
             <a:avLst/>
@@ -1374,9 +1397,9 @@
           <a:solidFill>
             <a:srgbClr val="FFFFFF"/>
           </a:solidFill>
-          <a:ln w="9525">
+          <a:ln w="12700">
             <a:solidFill>
-              <a:srgbClr val="BDBDBD"/>
+              <a:srgbClr val="9E9E9E"/>
             </a:solidFill>
             <a:prstDash val="solid"/>
           </a:ln>
@@ -1390,8 +1413,8 @@
         </p:nvSpPr>
         <p:spPr>
           <a:xfrm>
-            <a:off x="3328416" y="1165860"/>
-            <a:ext cx="173736" cy="164592"/>
+            <a:off x="5530291" y="804672"/>
+            <a:ext cx="292608" cy="274320"/>
           </a:xfrm>
           <a:prstGeom prst="rect">
             <a:avLst/>
@@ -1407,9 +1430,9 @@
               <a:buNone/>
             </a:pPr>
             <a:r>
-              <a:rPr lang="en-US" sz="800" b="1" dirty="0">
+              <a:rPr lang="en-US" sz="1300" b="1" dirty="0">
                 <a:solidFill>
-                  <a:srgbClr val="616161"/>
+                  <a:srgbClr val="424242"/>
                 </a:solidFill>
                 <a:latin typeface="Zen Maru Gothic" pitchFamily="34" charset="0"/>
                 <a:ea typeface="Zen Maru Gothic" pitchFamily="34" charset="-122"/>
@@ -1417,7 +1440,7 @@
               </a:rPr>
               <a:t>4</a:t>
             </a:r>
-            <a:endParaRPr lang="en-US" sz="800" dirty="0"/>
+            <a:endParaRPr lang="en-US" sz="1300" dirty="0"/>
           </a:p>
         </p:txBody>
       </p:sp>
@@ -1437,8 +1460,8 @@
         </p:blipFill>
         <p:spPr>
           <a:xfrm>
-            <a:off x="4306824" y="1143000"/>
-            <a:ext cx="941832" cy="530352"/>
+            <a:off x="7236562" y="749808"/>
+            <a:ext cx="1678838" cy="944347"/>
           </a:xfrm>
           <a:prstGeom prst="rect">
             <a:avLst/>
@@ -1453,8 +1476,8 @@
         </p:nvSpPr>
         <p:spPr>
           <a:xfrm>
-            <a:off x="4325112" y="1161288"/>
-            <a:ext cx="173736" cy="173736"/>
+            <a:off x="7282282" y="795528"/>
+            <a:ext cx="292608" cy="292608"/>
           </a:xfrm>
           <a:prstGeom prst="ellipse">
             <a:avLst/>
@@ -1462,9 +1485,9 @@
           <a:solidFill>
             <a:srgbClr val="FFFFFF"/>
           </a:solidFill>
-          <a:ln w="9525">
+          <a:ln w="12700">
             <a:solidFill>
-              <a:srgbClr val="BDBDBD"/>
+              <a:srgbClr val="9E9E9E"/>
             </a:solidFill>
             <a:prstDash val="solid"/>
           </a:ln>
@@ -1478,8 +1501,8 @@
         </p:nvSpPr>
         <p:spPr>
           <a:xfrm>
-            <a:off x="4325112" y="1165860"/>
-            <a:ext cx="173736" cy="164592"/>
+            <a:off x="7282282" y="804672"/>
+            <a:ext cx="292608" cy="274320"/>
           </a:xfrm>
           <a:prstGeom prst="rect">
             <a:avLst/>
@@ -1495,9 +1518,9 @@
               <a:buNone/>
             </a:pPr>
             <a:r>
-              <a:rPr lang="en-US" sz="800" b="1" dirty="0">
+              <a:rPr lang="en-US" sz="1300" b="1" dirty="0">
                 <a:solidFill>
-                  <a:srgbClr val="616161"/>
+                  <a:srgbClr val="424242"/>
                 </a:solidFill>
                 <a:latin typeface="Zen Maru Gothic" pitchFamily="34" charset="0"/>
                 <a:ea typeface="Zen Maru Gothic" pitchFamily="34" charset="-122"/>
@@ -1505,7 +1528,7 @@
               </a:rPr>
               <a:t>5</a:t>
             </a:r>
-            <a:endParaRPr lang="en-US" sz="800" dirty="0"/>
+            <a:endParaRPr lang="en-US" sz="1300" dirty="0"/>
           </a:p>
         </p:txBody>
       </p:sp>
@@ -1525,8 +1548,8 @@
         </p:blipFill>
         <p:spPr>
           <a:xfrm>
-            <a:off x="320040" y="1764792"/>
-            <a:ext cx="941832" cy="530352"/>
+            <a:off x="228600" y="1785595"/>
+            <a:ext cx="1678838" cy="944347"/>
           </a:xfrm>
           <a:prstGeom prst="rect">
             <a:avLst/>
@@ -1541,8 +1564,8 @@
         </p:nvSpPr>
         <p:spPr>
           <a:xfrm>
-            <a:off x="338328" y="1783080"/>
-            <a:ext cx="173736" cy="173736"/>
+            <a:off x="274320" y="1831315"/>
+            <a:ext cx="292608" cy="292608"/>
           </a:xfrm>
           <a:prstGeom prst="ellipse">
             <a:avLst/>
@@ -1550,9 +1573,9 @@
           <a:solidFill>
             <a:srgbClr val="FFFFFF"/>
           </a:solidFill>
-          <a:ln w="9525">
+          <a:ln w="12700">
             <a:solidFill>
-              <a:srgbClr val="BDBDBD"/>
+              <a:srgbClr val="9E9E9E"/>
             </a:solidFill>
             <a:prstDash val="solid"/>
           </a:ln>
@@ -1566,8 +1589,8 @@
         </p:nvSpPr>
         <p:spPr>
           <a:xfrm>
-            <a:off x="338328" y="1787652"/>
-            <a:ext cx="173736" cy="164592"/>
+            <a:off x="274320" y="1840459"/>
+            <a:ext cx="292608" cy="274320"/>
           </a:xfrm>
           <a:prstGeom prst="rect">
             <a:avLst/>
@@ -1583,9 +1606,9 @@
               <a:buNone/>
             </a:pPr>
             <a:r>
-              <a:rPr lang="en-US" sz="800" b="1" dirty="0">
+              <a:rPr lang="en-US" sz="1300" b="1" dirty="0">
                 <a:solidFill>
-                  <a:srgbClr val="616161"/>
+                  <a:srgbClr val="424242"/>
                 </a:solidFill>
                 <a:latin typeface="Zen Maru Gothic" pitchFamily="34" charset="0"/>
                 <a:ea typeface="Zen Maru Gothic" pitchFamily="34" charset="-122"/>
@@ -1593,7 +1616,7 @@
               </a:rPr>
               <a:t>6</a:t>
             </a:r>
-            <a:endParaRPr lang="en-US" sz="800" dirty="0"/>
+            <a:endParaRPr lang="en-US" sz="1300" dirty="0"/>
           </a:p>
         </p:txBody>
       </p:sp>
@@ -1613,8 +1636,8 @@
         </p:blipFill>
         <p:spPr>
           <a:xfrm>
-            <a:off x="1316736" y="1764792"/>
-            <a:ext cx="941832" cy="530352"/>
+            <a:off x="1980590" y="1785595"/>
+            <a:ext cx="1678838" cy="944347"/>
           </a:xfrm>
           <a:prstGeom prst="rect">
             <a:avLst/>
@@ -1629,8 +1652,8 @@
         </p:nvSpPr>
         <p:spPr>
           <a:xfrm>
-            <a:off x="1335024" y="1783080"/>
-            <a:ext cx="173736" cy="173736"/>
+            <a:off x="2026310" y="1831315"/>
+            <a:ext cx="292608" cy="292608"/>
           </a:xfrm>
           <a:prstGeom prst="ellipse">
             <a:avLst/>
@@ -1638,9 +1661,9 @@
           <a:solidFill>
             <a:srgbClr val="FFFFFF"/>
           </a:solidFill>
-          <a:ln w="9525">
+          <a:ln w="12700">
             <a:solidFill>
-              <a:srgbClr val="BDBDBD"/>
+              <a:srgbClr val="9E9E9E"/>
             </a:solidFill>
             <a:prstDash val="solid"/>
           </a:ln>
@@ -1654,8 +1677,8 @@
         </p:nvSpPr>
         <p:spPr>
           <a:xfrm>
-            <a:off x="1335024" y="1787652"/>
-            <a:ext cx="173736" cy="164592"/>
+            <a:off x="2026310" y="1840459"/>
+            <a:ext cx="292608" cy="274320"/>
           </a:xfrm>
           <a:prstGeom prst="rect">
             <a:avLst/>
@@ -1671,9 +1694,9 @@
               <a:buNone/>
             </a:pPr>
             <a:r>
-              <a:rPr lang="en-US" sz="800" b="1" dirty="0">
+              <a:rPr lang="en-US" sz="1300" b="1" dirty="0">
                 <a:solidFill>
-                  <a:srgbClr val="616161"/>
+                  <a:srgbClr val="424242"/>
                 </a:solidFill>
                 <a:latin typeface="Zen Maru Gothic" pitchFamily="34" charset="0"/>
                 <a:ea typeface="Zen Maru Gothic" pitchFamily="34" charset="-122"/>
@@ -1681,7 +1704,7 @@
               </a:rPr>
               <a:t>7</a:t>
             </a:r>
-            <a:endParaRPr lang="en-US" sz="800" dirty="0"/>
+            <a:endParaRPr lang="en-US" sz="1300" dirty="0"/>
           </a:p>
         </p:txBody>
       </p:sp>
@@ -1701,8 +1724,8 @@
         </p:blipFill>
         <p:spPr>
           <a:xfrm>
-            <a:off x="2313432" y="1764792"/>
-            <a:ext cx="941832" cy="530352"/>
+            <a:off x="3732581" y="1785595"/>
+            <a:ext cx="1678838" cy="944347"/>
           </a:xfrm>
           <a:prstGeom prst="rect">
             <a:avLst/>
@@ -1717,8 +1740,8 @@
         </p:nvSpPr>
         <p:spPr>
           <a:xfrm>
-            <a:off x="2331720" y="1783080"/>
-            <a:ext cx="173736" cy="173736"/>
+            <a:off x="3778301" y="1831315"/>
+            <a:ext cx="292608" cy="292608"/>
           </a:xfrm>
           <a:prstGeom prst="ellipse">
             <a:avLst/>
@@ -1726,9 +1749,9 @@
           <a:solidFill>
             <a:srgbClr val="FFFFFF"/>
           </a:solidFill>
-          <a:ln w="9525">
+          <a:ln w="12700">
             <a:solidFill>
-              <a:srgbClr val="BDBDBD"/>
+              <a:srgbClr val="9E9E9E"/>
             </a:solidFill>
             <a:prstDash val="solid"/>
           </a:ln>
@@ -1742,8 +1765,8 @@
         </p:nvSpPr>
         <p:spPr>
           <a:xfrm>
-            <a:off x="2331720" y="1787652"/>
-            <a:ext cx="173736" cy="164592"/>
+            <a:off x="3778301" y="1840459"/>
+            <a:ext cx="292608" cy="274320"/>
           </a:xfrm>
           <a:prstGeom prst="rect">
             <a:avLst/>
@@ -1759,9 +1782,9 @@
               <a:buNone/>
             </a:pPr>
             <a:r>
-              <a:rPr lang="en-US" sz="800" b="1" dirty="0">
+              <a:rPr lang="en-US" sz="1300" b="1" dirty="0">
                 <a:solidFill>
-                  <a:srgbClr val="616161"/>
+                  <a:srgbClr val="424242"/>
                 </a:solidFill>
                 <a:latin typeface="Zen Maru Gothic" pitchFamily="34" charset="0"/>
                 <a:ea typeface="Zen Maru Gothic" pitchFamily="34" charset="-122"/>
@@ -1769,7 +1792,7 @@
               </a:rPr>
               <a:t>8</a:t>
             </a:r>
-            <a:endParaRPr lang="en-US" sz="800" dirty="0"/>
+            <a:endParaRPr lang="en-US" sz="1300" dirty="0"/>
           </a:p>
         </p:txBody>
       </p:sp>
@@ -1789,8 +1812,8 @@
         </p:blipFill>
         <p:spPr>
           <a:xfrm>
-            <a:off x="3310128" y="1764792"/>
-            <a:ext cx="941832" cy="530352"/>
+            <a:off x="5484571" y="1785595"/>
+            <a:ext cx="1678838" cy="944347"/>
           </a:xfrm>
           <a:prstGeom prst="rect">
             <a:avLst/>
@@ -1805,8 +1828,8 @@
         </p:nvSpPr>
         <p:spPr>
           <a:xfrm>
-            <a:off x="3328416" y="1783080"/>
-            <a:ext cx="173736" cy="173736"/>
+            <a:off x="5530291" y="1831315"/>
+            <a:ext cx="292608" cy="292608"/>
           </a:xfrm>
           <a:prstGeom prst="ellipse">
             <a:avLst/>
@@ -1814,9 +1837,9 @@
           <a:solidFill>
             <a:srgbClr val="FFFFFF"/>
           </a:solidFill>
-          <a:ln w="9525">
+          <a:ln w="12700">
             <a:solidFill>
-              <a:srgbClr val="BDBDBD"/>
+              <a:srgbClr val="9E9E9E"/>
             </a:solidFill>
             <a:prstDash val="solid"/>
           </a:ln>
@@ -1830,8 +1853,8 @@
         </p:nvSpPr>
         <p:spPr>
           <a:xfrm>
-            <a:off x="3328416" y="1787652"/>
-            <a:ext cx="173736" cy="164592"/>
+            <a:off x="5530291" y="1840459"/>
+            <a:ext cx="292608" cy="274320"/>
           </a:xfrm>
           <a:prstGeom prst="rect">
             <a:avLst/>
@@ -1847,9 +1870,9 @@
               <a:buNone/>
             </a:pPr>
             <a:r>
-              <a:rPr lang="en-US" sz="800" b="1" dirty="0">
+              <a:rPr lang="en-US" sz="1300" b="1" dirty="0">
                 <a:solidFill>
-                  <a:srgbClr val="616161"/>
+                  <a:srgbClr val="424242"/>
                 </a:solidFill>
                 <a:latin typeface="Zen Maru Gothic" pitchFamily="34" charset="0"/>
                 <a:ea typeface="Zen Maru Gothic" pitchFamily="34" charset="-122"/>
@@ -1857,7 +1880,7 @@
               </a:rPr>
               <a:t>9</a:t>
             </a:r>
-            <a:endParaRPr lang="en-US" sz="800" dirty="0"/>
+            <a:endParaRPr lang="en-US" sz="1300" dirty="0"/>
           </a:p>
         </p:txBody>
       </p:sp>
@@ -1877,8 +1900,8 @@
         </p:blipFill>
         <p:spPr>
           <a:xfrm>
-            <a:off x="4306824" y="1764792"/>
-            <a:ext cx="941832" cy="530352"/>
+            <a:off x="7236562" y="1785595"/>
+            <a:ext cx="1678838" cy="944347"/>
           </a:xfrm>
           <a:prstGeom prst="rect">
             <a:avLst/>
@@ -1893,8 +1916,8 @@
         </p:nvSpPr>
         <p:spPr>
           <a:xfrm>
-            <a:off x="4325112" y="1783080"/>
-            <a:ext cx="173736" cy="173736"/>
+            <a:off x="7282282" y="1831315"/>
+            <a:ext cx="292608" cy="292608"/>
           </a:xfrm>
           <a:prstGeom prst="ellipse">
             <a:avLst/>
@@ -1902,9 +1925,9 @@
           <a:solidFill>
             <a:srgbClr val="FFFFFF"/>
           </a:solidFill>
-          <a:ln w="9525">
+          <a:ln w="12700">
             <a:solidFill>
-              <a:srgbClr val="BDBDBD"/>
+              <a:srgbClr val="9E9E9E"/>
             </a:solidFill>
             <a:prstDash val="solid"/>
           </a:ln>
@@ -1918,8 +1941,8 @@
         </p:nvSpPr>
         <p:spPr>
           <a:xfrm>
-            <a:off x="4325112" y="1787652"/>
-            <a:ext cx="173736" cy="164592"/>
+            <a:off x="7282282" y="1840459"/>
+            <a:ext cx="292608" cy="274320"/>
           </a:xfrm>
           <a:prstGeom prst="rect">
             <a:avLst/>
@@ -1935,9 +1958,9 @@
               <a:buNone/>
             </a:pPr>
             <a:r>
-              <a:rPr lang="en-US" sz="800" b="1" dirty="0">
+              <a:rPr lang="en-US" sz="1300" b="1" dirty="0">
                 <a:solidFill>
-                  <a:srgbClr val="616161"/>
+                  <a:srgbClr val="424242"/>
                 </a:solidFill>
                 <a:latin typeface="Zen Maru Gothic" pitchFamily="34" charset="0"/>
                 <a:ea typeface="Zen Maru Gothic" pitchFamily="34" charset="-122"/>
@@ -1945,7 +1968,7 @@
               </a:rPr>
               <a:t>10</a:t>
             </a:r>
-            <a:endParaRPr lang="en-US" sz="800" dirty="0"/>
+            <a:endParaRPr lang="en-US" sz="1300" dirty="0"/>
           </a:p>
         </p:txBody>
       </p:sp>
@@ -1965,8 +1988,8 @@
         </p:blipFill>
         <p:spPr>
           <a:xfrm>
-            <a:off x="320040" y="2386584"/>
-            <a:ext cx="941832" cy="530352"/>
+            <a:off x="228600" y="2821381"/>
+            <a:ext cx="1678838" cy="944347"/>
           </a:xfrm>
           <a:prstGeom prst="rect">
             <a:avLst/>
@@ -1981,8 +2004,8 @@
         </p:nvSpPr>
         <p:spPr>
           <a:xfrm>
-            <a:off x="338328" y="2404872"/>
-            <a:ext cx="173736" cy="173736"/>
+            <a:off x="274320" y="2867101"/>
+            <a:ext cx="292608" cy="292608"/>
           </a:xfrm>
           <a:prstGeom prst="ellipse">
             <a:avLst/>
@@ -1990,9 +2013,9 @@
           <a:solidFill>
             <a:srgbClr val="FFFFFF"/>
           </a:solidFill>
-          <a:ln w="9525">
+          <a:ln w="12700">
             <a:solidFill>
-              <a:srgbClr val="BDBDBD"/>
+              <a:srgbClr val="9E9E9E"/>
             </a:solidFill>
             <a:prstDash val="solid"/>
           </a:ln>
@@ -2006,8 +2029,8 @@
         </p:nvSpPr>
         <p:spPr>
           <a:xfrm>
-            <a:off x="338328" y="2409444"/>
-            <a:ext cx="173736" cy="164592"/>
+            <a:off x="274320" y="2876245"/>
+            <a:ext cx="292608" cy="274320"/>
           </a:xfrm>
           <a:prstGeom prst="rect">
             <a:avLst/>
@@ -2023,9 +2046,9 @@
               <a:buNone/>
             </a:pPr>
             <a:r>
-              <a:rPr lang="en-US" sz="800" b="1" dirty="0">
+              <a:rPr lang="en-US" sz="1300" b="1" dirty="0">
                 <a:solidFill>
-                  <a:srgbClr val="616161"/>
+                  <a:srgbClr val="424242"/>
                 </a:solidFill>
                 <a:latin typeface="Zen Maru Gothic" pitchFamily="34" charset="0"/>
                 <a:ea typeface="Zen Maru Gothic" pitchFamily="34" charset="-122"/>
@@ -2033,7 +2056,7 @@
               </a:rPr>
               <a:t>11</a:t>
             </a:r>
-            <a:endParaRPr lang="en-US" sz="800" dirty="0"/>
+            <a:endParaRPr lang="en-US" sz="1300" dirty="0"/>
           </a:p>
         </p:txBody>
       </p:sp>
@@ -2053,8 +2076,8 @@
         </p:blipFill>
         <p:spPr>
           <a:xfrm>
-            <a:off x="1316736" y="2386584"/>
-            <a:ext cx="941832" cy="530352"/>
+            <a:off x="1980590" y="2821381"/>
+            <a:ext cx="1678838" cy="944347"/>
           </a:xfrm>
           <a:prstGeom prst="rect">
             <a:avLst/>
@@ -2069,8 +2092,8 @@
         </p:nvSpPr>
         <p:spPr>
           <a:xfrm>
-            <a:off x="1335024" y="2404872"/>
-            <a:ext cx="173736" cy="173736"/>
+            <a:off x="2026310" y="2867101"/>
+            <a:ext cx="292608" cy="292608"/>
           </a:xfrm>
           <a:prstGeom prst="ellipse">
             <a:avLst/>
@@ -2078,9 +2101,9 @@
           <a:solidFill>
             <a:srgbClr val="FFFFFF"/>
           </a:solidFill>
-          <a:ln w="9525">
+          <a:ln w="12700">
             <a:solidFill>
-              <a:srgbClr val="BDBDBD"/>
+              <a:srgbClr val="9E9E9E"/>
             </a:solidFill>
             <a:prstDash val="solid"/>
           </a:ln>
@@ -2094,8 +2117,8 @@
         </p:nvSpPr>
         <p:spPr>
           <a:xfrm>
-            <a:off x="1335024" y="2409444"/>
-            <a:ext cx="173736" cy="164592"/>
+            <a:off x="2026310" y="2876245"/>
+            <a:ext cx="292608" cy="274320"/>
           </a:xfrm>
           <a:prstGeom prst="rect">
             <a:avLst/>
@@ -2111,9 +2134,9 @@
               <a:buNone/>
             </a:pPr>
             <a:r>
-              <a:rPr lang="en-US" sz="800" b="1" dirty="0">
+              <a:rPr lang="en-US" sz="1300" b="1" dirty="0">
                 <a:solidFill>
-                  <a:srgbClr val="616161"/>
+                  <a:srgbClr val="424242"/>
                 </a:solidFill>
                 <a:latin typeface="Zen Maru Gothic" pitchFamily="34" charset="0"/>
                 <a:ea typeface="Zen Maru Gothic" pitchFamily="34" charset="-122"/>
@@ -2121,7 +2144,7 @@
               </a:rPr>
               <a:t>12</a:t>
             </a:r>
-            <a:endParaRPr lang="en-US" sz="800" dirty="0"/>
+            <a:endParaRPr lang="en-US" sz="1300" dirty="0"/>
           </a:p>
         </p:txBody>
       </p:sp>
@@ -2141,8 +2164,8 @@
         </p:blipFill>
         <p:spPr>
           <a:xfrm>
-            <a:off x="2313432" y="2386584"/>
-            <a:ext cx="941832" cy="530352"/>
+            <a:off x="3732581" y="2821381"/>
+            <a:ext cx="1678838" cy="944347"/>
           </a:xfrm>
           <a:prstGeom prst="rect">
             <a:avLst/>
@@ -2157,8 +2180,8 @@
         </p:nvSpPr>
         <p:spPr>
           <a:xfrm>
-            <a:off x="2331720" y="2404872"/>
-            <a:ext cx="173736" cy="173736"/>
+            <a:off x="3778301" y="2867101"/>
+            <a:ext cx="292608" cy="292608"/>
           </a:xfrm>
           <a:prstGeom prst="ellipse">
             <a:avLst/>
@@ -2166,9 +2189,9 @@
           <a:solidFill>
             <a:srgbClr val="FFFFFF"/>
           </a:solidFill>
-          <a:ln w="9525">
+          <a:ln w="12700">
             <a:solidFill>
-              <a:srgbClr val="BDBDBD"/>
+              <a:srgbClr val="9E9E9E"/>
             </a:solidFill>
             <a:prstDash val="solid"/>
           </a:ln>
@@ -2182,8 +2205,8 @@
         </p:nvSpPr>
         <p:spPr>
           <a:xfrm>
-            <a:off x="2331720" y="2409444"/>
-            <a:ext cx="173736" cy="164592"/>
+            <a:off x="3778301" y="2876245"/>
+            <a:ext cx="292608" cy="274320"/>
           </a:xfrm>
           <a:prstGeom prst="rect">
             <a:avLst/>
@@ -2199,9 +2222,9 @@
               <a:buNone/>
             </a:pPr>
             <a:r>
-              <a:rPr lang="en-US" sz="800" b="1" dirty="0">
+              <a:rPr lang="en-US" sz="1300" b="1" dirty="0">
                 <a:solidFill>
-                  <a:srgbClr val="616161"/>
+                  <a:srgbClr val="424242"/>
                 </a:solidFill>
                 <a:latin typeface="Zen Maru Gothic" pitchFamily="34" charset="0"/>
                 <a:ea typeface="Zen Maru Gothic" pitchFamily="34" charset="-122"/>
@@ -2209,20 +2232,47 @@
               </a:rPr>
               <a:t>13</a:t>
             </a:r>
-            <a:endParaRPr lang="en-US" sz="800" dirty="0"/>
-          </a:p>
-        </p:txBody>
-      </p:sp>
-      <p:sp>
-        <p:nvSpPr>
-          <p:cNvPr id="46" name="Text 31"/>
-          <p:cNvSpPr/>
-          <p:nvPr/>
-        </p:nvSpPr>
-        <p:spPr>
-          <a:xfrm>
-            <a:off x="320040" y="3118104"/>
-            <a:ext cx="5120640" cy="256032"/>
+            <a:endParaRPr lang="en-US" sz="1300" dirty="0"/>
+          </a:p>
+        </p:txBody>
+      </p:sp>
+      <p:sp>
+        <p:nvSpPr>
+          <p:cNvPr id="46" name="Shape 31"/>
+          <p:cNvSpPr/>
+          <p:nvPr/>
+        </p:nvSpPr>
+        <p:spPr>
+          <a:xfrm>
+            <a:off x="5484571" y="2967685"/>
+            <a:ext cx="3430829" cy="658368"/>
+          </a:xfrm>
+          <a:prstGeom prst="roundRect">
+            <a:avLst>
+              <a:gd name="adj" fmla="val 19444"/>
+            </a:avLst>
+          </a:prstGeom>
+          <a:solidFill>
+            <a:srgbClr val="FB8C00"/>
+          </a:solidFill>
+          <a:ln w="12700">
+            <a:solidFill>
+              <a:srgbClr val="FB8C00"/>
+            </a:solidFill>
+            <a:prstDash val="solid"/>
+          </a:ln>
+        </p:spPr>
+      </p:sp>
+      <p:sp>
+        <p:nvSpPr>
+          <p:cNvPr id="47" name="Text 32"/>
+          <p:cNvSpPr/>
+          <p:nvPr/>
+        </p:nvSpPr>
+        <p:spPr>
+          <a:xfrm>
+            <a:off x="5484571" y="2967685"/>
+            <a:ext cx="3430829" cy="658368"/>
           </a:xfrm>
           <a:prstGeom prst="rect">
             <a:avLst/>
@@ -2234,11 +2284,50 @@
           <a:bodyPr wrap="square" lIns="0" tIns="0" rIns="0" bIns="0" rtlCol="0" anchor="ctr"/>
           <a:lstStyle/>
           <a:p>
-            <a:pPr algn="l" indent="0" marL="0">
+            <a:pPr algn="ctr" indent="0" marL="0">
               <a:buNone/>
             </a:pPr>
             <a:r>
-              <a:rPr lang="en-US" sz="1100" b="1" dirty="0">
+              <a:rPr lang="en-US" sz="1400" b="1" dirty="0">
+                <a:solidFill>
+                  <a:srgbClr val="FFFFFF"/>
+                </a:solidFill>
+                <a:latin typeface="Zen Maru Gothic" pitchFamily="34" charset="0"/>
+                <a:ea typeface="Zen Maru Gothic" pitchFamily="34" charset="-122"/>
+                <a:cs typeface="Zen Maru Gothic" pitchFamily="34" charset="-120"/>
+              </a:rPr>
+              <a:t>⑥〜⑨ ここが 試行錯誤の 4ページ</a:t>
+            </a:r>
+            <a:endParaRPr lang="en-US" sz="1400" dirty="0"/>
+          </a:p>
+        </p:txBody>
+      </p:sp>
+      <p:sp>
+        <p:nvSpPr>
+          <p:cNvPr id="48" name="Text 33"/>
+          <p:cNvSpPr/>
+          <p:nvPr/>
+        </p:nvSpPr>
+        <p:spPr>
+          <a:xfrm>
+            <a:off x="5484571" y="3662629"/>
+            <a:ext cx="3430829" cy="274320"/>
+          </a:xfrm>
+          <a:prstGeom prst="rect">
+            <a:avLst/>
+          </a:prstGeom>
+          <a:noFill/>
+          <a:ln/>
+        </p:spPr>
+        <p:txBody>
+          <a:bodyPr wrap="square" lIns="0" tIns="0" rIns="0" bIns="0" rtlCol="0" anchor="ctr"/>
+          <a:lstStyle/>
+          <a:p>
+            <a:pPr algn="ctr" indent="0" marL="0">
+              <a:buNone/>
+            </a:pPr>
+            <a:r>
+              <a:rPr lang="en-US" sz="1000" b="1" dirty="0">
                 <a:solidFill>
                   <a:srgbClr val="FB8C00"/>
                 </a:solidFill>
@@ -2246,26 +2335,26 @@
                 <a:ea typeface="Zen Maru Gothic" pitchFamily="34" charset="-122"/>
                 <a:cs typeface="Zen Maru Gothic" pitchFamily="34" charset="-120"/>
               </a:rPr>
-              <a:t>↑ ⑥〜⑨が「うまく いかない → かんがえる → できた」の 4ページ</a:t>
-            </a:r>
-            <a:endParaRPr lang="en-US" sz="1100" dirty="0"/>
-          </a:p>
-        </p:txBody>
-      </p:sp>
-      <p:sp>
-        <p:nvSpPr>
-          <p:cNvPr id="47" name="Shape 32"/>
-          <p:cNvSpPr/>
-          <p:nvPr/>
-        </p:nvSpPr>
-        <p:spPr>
-          <a:xfrm>
-            <a:off x="5623560" y="1143000"/>
-            <a:ext cx="3200400" cy="987552"/>
+              <a:t>「うまく いかない → かんがえる → やって みる」が 主役</a:t>
+            </a:r>
+            <a:endParaRPr lang="en-US" sz="1000" dirty="0"/>
+          </a:p>
+        </p:txBody>
+      </p:sp>
+      <p:sp>
+        <p:nvSpPr>
+          <p:cNvPr id="49" name="Shape 34"/>
+          <p:cNvSpPr/>
+          <p:nvPr/>
+        </p:nvSpPr>
+        <p:spPr>
+          <a:xfrm>
+            <a:off x="228600" y="3950208"/>
+            <a:ext cx="2788920" cy="731520"/>
           </a:xfrm>
           <a:prstGeom prst="roundRect">
             <a:avLst>
-              <a:gd name="adj" fmla="val 11111"/>
+              <a:gd name="adj" fmla="val 15000"/>
             </a:avLst>
           </a:prstGeom>
           <a:solidFill>
@@ -2281,7 +2370,7 @@
       </p:sp>
       <p:pic>
         <p:nvPicPr>
-          <p:cNvPr id="48" name="Image 13" descr="/Users/eri-ca/Desktop/はっぴょうメーカー/Canvaテンプレート/あきのおもちゃ/イラスト/maracas.png">    </p:cNvPr>
+          <p:cNvPr id="50" name="Image 13" descr="/Users/eri-ca/Desktop/はっぴょうメーカー/Canvaテンプレート/あきのおもちゃ/イラスト/maracas.png">    </p:cNvPr>
           <p:cNvPicPr>
             <a:picLocks noChangeAspect="1"/>
           </p:cNvPicPr>
@@ -2295,7 +2384,7 @@
         </p:blipFill>
         <p:spPr>
           <a:xfrm>
-            <a:off x="5705856" y="1344168"/>
+            <a:off x="301752" y="4041648"/>
             <a:ext cx="548640" cy="548640"/>
           </a:xfrm>
           <a:prstGeom prst="rect">
@@ -2305,14 +2394,14 @@
       </p:pic>
       <p:sp>
         <p:nvSpPr>
-          <p:cNvPr id="49" name="Text 33"/>
-          <p:cNvSpPr/>
-          <p:nvPr/>
-        </p:nvSpPr>
-        <p:spPr>
-          <a:xfrm>
-            <a:off x="6309360" y="1234440"/>
-            <a:ext cx="2395728" cy="256032"/>
+          <p:cNvPr id="51" name="Text 35"/>
+          <p:cNvSpPr/>
+          <p:nvPr/>
+        </p:nvSpPr>
+        <p:spPr>
+          <a:xfrm>
+            <a:off x="905256" y="4014216"/>
+            <a:ext cx="2039112" cy="274320"/>
           </a:xfrm>
           <a:prstGeom prst="rect">
             <a:avLst/>
@@ -2344,14 +2433,14 @@
       </p:sp>
       <p:sp>
         <p:nvSpPr>
-          <p:cNvPr id="50" name="Text 34"/>
-          <p:cNvSpPr/>
-          <p:nvPr/>
-        </p:nvSpPr>
-        <p:spPr>
-          <a:xfrm>
-            <a:off x="6309360" y="1508760"/>
-            <a:ext cx="2432304" cy="530352"/>
+          <p:cNvPr id="52" name="Text 36"/>
+          <p:cNvSpPr/>
+          <p:nvPr/>
+        </p:nvSpPr>
+        <p:spPr>
+          <a:xfrm>
+            <a:off x="905256" y="4297680"/>
+            <a:ext cx="2039112" cy="310896"/>
           </a:xfrm>
           <a:prstGeom prst="rect">
             <a:avLst/>
@@ -2364,13 +2453,10 @@
           <a:lstStyle/>
           <a:p>
             <a:pPr indent="0" marL="0">
-              <a:lnSpc>
-                <a:spcPct val="110000"/>
-              </a:lnSpc>
               <a:buNone/>
             </a:pPr>
             <a:r>
-              <a:rPr lang="en-US" sz="900" dirty="0">
+              <a:rPr lang="en-US" sz="950" dirty="0">
                 <a:solidFill>
                   <a:srgbClr val="5D4037"/>
                 </a:solidFill>
@@ -2378,46 +2464,26 @@
                 <a:ea typeface="Zen Maru Gothic" pitchFamily="34" charset="-122"/>
                 <a:cs typeface="Zen Maru Gothic" pitchFamily="34" charset="-120"/>
               </a:rPr>
-              <a:t>「ことばカード」を（　）へドラッグ。</a:t>
-            </a:r>
-            <a:endParaRPr lang="en-US" sz="900" dirty="0"/>
-          </a:p>
-          <a:p>
-            <a:pPr indent="0" marL="0">
-              <a:lnSpc>
-                <a:spcPct val="110000"/>
-              </a:lnSpc>
-              <a:buNone/>
-            </a:pPr>
-            <a:r>
-              <a:rPr lang="en-US" sz="900" dirty="0">
-                <a:solidFill>
-                  <a:srgbClr val="5D4037"/>
-                </a:solidFill>
-                <a:latin typeface="Zen Maru Gothic" pitchFamily="34" charset="0"/>
-                <a:ea typeface="Zen Maru Gothic" pitchFamily="34" charset="-122"/>
-                <a:cs typeface="Zen Maru Gothic" pitchFamily="34" charset="-120"/>
-              </a:rPr>
-              <a:t>材料は いらないカードを消すだけ。</a:t>
-            </a:r>
-            <a:endParaRPr lang="en-US" sz="900" dirty="0"/>
-          </a:p>
-        </p:txBody>
-      </p:sp>
-      <p:sp>
-        <p:nvSpPr>
-          <p:cNvPr id="51" name="Shape 35"/>
-          <p:cNvSpPr/>
-          <p:nvPr/>
-        </p:nvSpPr>
-        <p:spPr>
-          <a:xfrm>
-            <a:off x="5623560" y="2203704"/>
-            <a:ext cx="3200400" cy="987552"/>
+              <a:t>ことばカードを（　）へドラッグするだけ</a:t>
+            </a:r>
+            <a:endParaRPr lang="en-US" sz="950" dirty="0"/>
+          </a:p>
+        </p:txBody>
+      </p:sp>
+      <p:sp>
+        <p:nvSpPr>
+          <p:cNvPr id="53" name="Shape 37"/>
+          <p:cNvSpPr/>
+          <p:nvPr/>
+        </p:nvSpPr>
+        <p:spPr>
+          <a:xfrm>
+            <a:off x="3127248" y="3950208"/>
+            <a:ext cx="2788920" cy="731520"/>
           </a:xfrm>
           <a:prstGeom prst="roundRect">
             <a:avLst>
-              <a:gd name="adj" fmla="val 11111"/>
+              <a:gd name="adj" fmla="val 15000"/>
             </a:avLst>
           </a:prstGeom>
           <a:solidFill>
@@ -2433,7 +2499,7 @@
       </p:sp>
       <p:pic>
         <p:nvPicPr>
-          <p:cNvPr id="52" name="Image 14" descr="/Users/eri-ca/Desktop/はっぴょうメーカー/Canvaテンプレート/あきのおもちゃ/イラスト/komatta.png">    </p:cNvPr>
+          <p:cNvPr id="54" name="Image 14" descr="/Users/eri-ca/Desktop/はっぴょうメーカー/Canvaテンプレート/あきのおもちゃ/イラスト/komatta.png">    </p:cNvPr>
           <p:cNvPicPr>
             <a:picLocks noChangeAspect="1"/>
           </p:cNvPicPr>
@@ -2447,7 +2513,7 @@
         </p:blipFill>
         <p:spPr>
           <a:xfrm>
-            <a:off x="5705856" y="2404872"/>
+            <a:off x="3200400" y="4041648"/>
             <a:ext cx="548640" cy="548640"/>
           </a:xfrm>
           <a:prstGeom prst="rect">
@@ -2457,14 +2523,14 @@
       </p:pic>
       <p:sp>
         <p:nvSpPr>
-          <p:cNvPr id="53" name="Text 36"/>
-          <p:cNvSpPr/>
-          <p:nvPr/>
-        </p:nvSpPr>
-        <p:spPr>
-          <a:xfrm>
-            <a:off x="6309360" y="2295144"/>
-            <a:ext cx="2395728" cy="256032"/>
+          <p:cNvPr id="55" name="Text 38"/>
+          <p:cNvSpPr/>
+          <p:nvPr/>
+        </p:nvSpPr>
+        <p:spPr>
+          <a:xfrm>
+            <a:off x="3803904" y="4014216"/>
+            <a:ext cx="2039112" cy="274320"/>
           </a:xfrm>
           <a:prstGeom prst="rect">
             <a:avLst/>
@@ -2496,14 +2562,14 @@
       </p:sp>
       <p:sp>
         <p:nvSpPr>
-          <p:cNvPr id="54" name="Text 37"/>
-          <p:cNvSpPr/>
-          <p:nvPr/>
-        </p:nvSpPr>
-        <p:spPr>
-          <a:xfrm>
-            <a:off x="6309360" y="2569464"/>
-            <a:ext cx="2432304" cy="530352"/>
+          <p:cNvPr id="56" name="Text 39"/>
+          <p:cNvSpPr/>
+          <p:nvPr/>
+        </p:nvSpPr>
+        <p:spPr>
+          <a:xfrm>
+            <a:off x="3803904" y="4297680"/>
+            <a:ext cx="2039112" cy="310896"/>
           </a:xfrm>
           <a:prstGeom prst="rect">
             <a:avLst/>
@@ -2516,13 +2582,10 @@
           <a:lstStyle/>
           <a:p>
             <a:pPr indent="0" marL="0">
-              <a:lnSpc>
-                <a:spcPct val="110000"/>
-              </a:lnSpc>
               <a:buNone/>
             </a:pPr>
             <a:r>
-              <a:rPr lang="en-US" sz="900" dirty="0">
+              <a:rPr lang="en-US" sz="950" dirty="0">
                 <a:solidFill>
                   <a:srgbClr val="5D4037"/>
                 </a:solidFill>
@@ -2530,46 +2593,26 @@
                 <a:ea typeface="Zen Maru Gothic" pitchFamily="34" charset="-122"/>
                 <a:cs typeface="Zen Maru Gothic" pitchFamily="34" charset="-120"/>
               </a:rPr>
-              <a:t>こまった→どうしたら?→まえ／あと。</a:t>
-            </a:r>
-            <a:endParaRPr lang="en-US" sz="900" dirty="0"/>
-          </a:p>
-          <a:p>
-            <a:pPr indent="0" marL="0">
-              <a:lnSpc>
-                <a:spcPct val="110000"/>
-              </a:lnSpc>
-              <a:buNone/>
-            </a:pPr>
-            <a:r>
-              <a:rPr lang="en-US" sz="900" dirty="0">
-                <a:solidFill>
-                  <a:srgbClr val="5D4037"/>
-                </a:solidFill>
-                <a:latin typeface="Zen Maru Gothic" pitchFamily="34" charset="0"/>
-                <a:ea typeface="Zen Maru Gothic" pitchFamily="34" charset="-122"/>
-                <a:cs typeface="Zen Maru Gothic" pitchFamily="34" charset="-120"/>
-              </a:rPr>
-              <a:t>がんばった過程が 主役になる。</a:t>
-            </a:r>
-            <a:endParaRPr lang="en-US" sz="900" dirty="0"/>
-          </a:p>
-        </p:txBody>
-      </p:sp>
-      <p:sp>
-        <p:nvSpPr>
-          <p:cNvPr id="55" name="Shape 38"/>
-          <p:cNvSpPr/>
-          <p:nvPr/>
-        </p:nvSpPr>
-        <p:spPr>
-          <a:xfrm>
-            <a:off x="5623560" y="3264408"/>
-            <a:ext cx="3200400" cy="987552"/>
+              <a:t>こまった → どうしたら? → まえ／あと</a:t>
+            </a:r>
+            <a:endParaRPr lang="en-US" sz="950" dirty="0"/>
+          </a:p>
+        </p:txBody>
+      </p:sp>
+      <p:sp>
+        <p:nvSpPr>
+          <p:cNvPr id="57" name="Shape 40"/>
+          <p:cNvSpPr/>
+          <p:nvPr/>
+        </p:nvSpPr>
+        <p:spPr>
+          <a:xfrm>
+            <a:off x="6025896" y="3950208"/>
+            <a:ext cx="2788920" cy="731520"/>
           </a:xfrm>
           <a:prstGeom prst="roundRect">
             <a:avLst>
-              <a:gd name="adj" fmla="val 11111"/>
+              <a:gd name="adj" fmla="val 15000"/>
             </a:avLst>
           </a:prstGeom>
           <a:solidFill>
@@ -2585,7 +2628,7 @@
       </p:sp>
       <p:pic>
         <p:nvPicPr>
-          <p:cNvPr id="56" name="Image 15" descr="/Users/eri-ca/Desktop/はっぴょうメーカー/Canvaテンプレート/あきのおもちゃ/イラスト/chibi.png">    </p:cNvPr>
+          <p:cNvPr id="58" name="Image 15" descr="/Users/eri-ca/Desktop/はっぴょうメーカー/Canvaテンプレート/あきのおもちゃ/イラスト/chibi.png">    </p:cNvPr>
           <p:cNvPicPr>
             <a:picLocks noChangeAspect="1"/>
           </p:cNvPicPr>
@@ -2599,7 +2642,7 @@
         </p:blipFill>
         <p:spPr>
           <a:xfrm>
-            <a:off x="5705856" y="3465576"/>
+            <a:off x="6099048" y="4041648"/>
             <a:ext cx="548640" cy="548640"/>
           </a:xfrm>
           <a:prstGeom prst="rect">
@@ -2609,14 +2652,14 @@
       </p:pic>
       <p:sp>
         <p:nvSpPr>
-          <p:cNvPr id="57" name="Text 39"/>
-          <p:cNvSpPr/>
-          <p:nvPr/>
-        </p:nvSpPr>
-        <p:spPr>
-          <a:xfrm>
-            <a:off x="6309360" y="3355848"/>
-            <a:ext cx="2395728" cy="256032"/>
+          <p:cNvPr id="59" name="Text 41"/>
+          <p:cNvSpPr/>
+          <p:nvPr/>
+        </p:nvSpPr>
+        <p:spPr>
+          <a:xfrm>
+            <a:off x="6702552" y="4014216"/>
+            <a:ext cx="2039112" cy="274320"/>
           </a:xfrm>
           <a:prstGeom prst="rect">
             <a:avLst/>
@@ -2648,14 +2691,14 @@
       </p:sp>
       <p:sp>
         <p:nvSpPr>
-          <p:cNvPr id="58" name="Text 40"/>
-          <p:cNvSpPr/>
-          <p:nvPr/>
-        </p:nvSpPr>
-        <p:spPr>
-          <a:xfrm>
-            <a:off x="6309360" y="3630168"/>
-            <a:ext cx="2432304" cy="530352"/>
+          <p:cNvPr id="60" name="Text 42"/>
+          <p:cNvSpPr/>
+          <p:nvPr/>
+        </p:nvSpPr>
+        <p:spPr>
+          <a:xfrm>
+            <a:off x="6702552" y="4297680"/>
+            <a:ext cx="2039112" cy="310896"/>
           </a:xfrm>
           <a:prstGeom prst="rect">
             <a:avLst/>
@@ -2668,13 +2711,10 @@
           <a:lstStyle/>
           <a:p>
             <a:pPr indent="0" marL="0">
-              <a:lnSpc>
-                <a:spcPct val="110000"/>
-              </a:lnSpc>
               <a:buNone/>
             </a:pPr>
             <a:r>
-              <a:rPr lang="en-US" sz="900" dirty="0">
+              <a:rPr lang="en-US" sz="950" dirty="0">
                 <a:solidFill>
                   <a:srgbClr val="5D4037"/>
                 </a:solidFill>
@@ -2682,157 +2722,48 @@
                 <a:ea typeface="Zen Maru Gothic" pitchFamily="34" charset="-122"/>
                 <a:cs typeface="Zen Maru Gothic" pitchFamily="34" charset="-120"/>
               </a:rPr>
-              <a:t>最後は「はやく あそんで もらいたいな!」</a:t>
-            </a:r>
-            <a:endParaRPr lang="en-US" sz="900" dirty="0"/>
-          </a:p>
-          <a:p>
-            <a:pPr indent="0" marL="0">
-              <a:lnSpc>
-                <a:spcPct val="110000"/>
-              </a:lnSpc>
+              <a:t>「はやく あそんで もらいたいな!」</a:t>
+            </a:r>
+            <a:endParaRPr lang="en-US" sz="950" dirty="0"/>
+          </a:p>
+        </p:txBody>
+      </p:sp>
+      <p:sp>
+        <p:nvSpPr>
+          <p:cNvPr id="61" name="Text 43"/>
+          <p:cNvSpPr/>
+          <p:nvPr/>
+        </p:nvSpPr>
+        <p:spPr>
+          <a:xfrm>
+            <a:off x="228600" y="4773168"/>
+            <a:ext cx="8686800" cy="256032"/>
+          </a:xfrm>
+          <a:prstGeom prst="rect">
+            <a:avLst/>
+          </a:prstGeom>
+          <a:noFill/>
+          <a:ln/>
+        </p:spPr>
+        <p:txBody>
+          <a:bodyPr wrap="square" lIns="0" tIns="0" rIns="0" bIns="0" rtlCol="0" anchor="ctr"/>
+          <a:lstStyle/>
+          <a:p>
+            <a:pPr algn="ctr" indent="0" marL="0">
               <a:buNone/>
             </a:pPr>
             <a:r>
-              <a:rPr lang="en-US" sz="900" dirty="0">
+              <a:rPr lang="en-US" sz="950" dirty="0">
                 <a:solidFill>
-                  <a:srgbClr val="5D4037"/>
+                  <a:srgbClr val="757575"/>
                 </a:solidFill>
                 <a:latin typeface="Zen Maru Gothic" pitchFamily="34" charset="0"/>
                 <a:ea typeface="Zen Maru Gothic" pitchFamily="34" charset="-122"/>
                 <a:cs typeface="Zen Maru Gothic" pitchFamily="34" charset="-120"/>
               </a:rPr>
-              <a:t>相手意識をもって ふり返る。</a:t>
-            </a:r>
-            <a:endParaRPr lang="en-US" sz="900" dirty="0"/>
-          </a:p>
-        </p:txBody>
-      </p:sp>
-      <p:sp>
-        <p:nvSpPr>
-          <p:cNvPr id="59" name="Shape 41"/>
-          <p:cNvSpPr/>
-          <p:nvPr/>
-        </p:nvSpPr>
-        <p:spPr>
-          <a:xfrm>
-            <a:off x="5623560" y="4370832"/>
-            <a:ext cx="3200400" cy="548640"/>
-          </a:xfrm>
-          <a:prstGeom prst="roundRect">
-            <a:avLst>
-              <a:gd name="adj" fmla="val 16667"/>
-            </a:avLst>
-          </a:prstGeom>
-          <a:solidFill>
-            <a:srgbClr val="F5F5F5"/>
-          </a:solidFill>
-          <a:ln w="19050">
-            <a:solidFill>
-              <a:srgbClr val="E0E0E0"/>
-            </a:solidFill>
-            <a:prstDash val="solid"/>
-          </a:ln>
-        </p:spPr>
-      </p:sp>
-      <p:sp>
-        <p:nvSpPr>
-          <p:cNvPr id="60" name="Text 42"/>
-          <p:cNvSpPr/>
-          <p:nvPr/>
-        </p:nvSpPr>
-        <p:spPr>
-          <a:xfrm>
-            <a:off x="5669280" y="4370832"/>
-            <a:ext cx="3108960" cy="548640"/>
-          </a:xfrm>
-          <a:prstGeom prst="rect">
-            <a:avLst/>
-          </a:prstGeom>
-          <a:noFill/>
-          <a:ln/>
-        </p:spPr>
-        <p:txBody>
-          <a:bodyPr wrap="square" lIns="0" tIns="0" rIns="0" bIns="0" rtlCol="0" anchor="ctr"/>
-          <a:lstStyle/>
-          <a:p>
-            <a:pPr algn="ctr" indent="0" marL="0">
-              <a:lnSpc>
-                <a:spcPct val="115000"/>
-              </a:lnSpc>
-              <a:buNone/>
-            </a:pPr>
-            <a:r>
-              <a:rPr lang="en-US" sz="950" dirty="0">
-                <a:solidFill>
-                  <a:srgbClr val="616161"/>
-                </a:solidFill>
-                <a:latin typeface="Zen Maru Gothic" pitchFamily="34" charset="0"/>
-                <a:ea typeface="Zen Maru Gothic" pitchFamily="34" charset="-122"/>
-                <a:cs typeface="Zen Maru Gothic" pitchFamily="34" charset="-120"/>
-              </a:rPr>
-              <a:t>pptxをCanvaに読み込む → クラスの課題として配信</a:t>
+              <a:t>※ うまくいかなかったときの写真を、作っている途中で撮っておくのがポイント　／　pptxをCanvaに読み込み → クラスの課題として配信 → 提出物は先生の画面に集まる</a:t>
             </a:r>
             <a:endParaRPr lang="en-US" sz="950" dirty="0"/>
-          </a:p>
-          <a:p>
-            <a:pPr algn="ctr" indent="0" marL="0">
-              <a:lnSpc>
-                <a:spcPct val="115000"/>
-              </a:lnSpc>
-              <a:buNone/>
-            </a:pPr>
-            <a:r>
-              <a:rPr lang="en-US" sz="950" dirty="0">
-                <a:solidFill>
-                  <a:srgbClr val="616161"/>
-                </a:solidFill>
-                <a:latin typeface="Zen Maru Gothic" pitchFamily="34" charset="0"/>
-                <a:ea typeface="Zen Maru Gothic" pitchFamily="34" charset="-122"/>
-                <a:cs typeface="Zen Maru Gothic" pitchFamily="34" charset="-120"/>
-              </a:rPr>
-              <a:t>→ 提出物は先生の画面に集まる</a:t>
-            </a:r>
-            <a:endParaRPr lang="en-US" sz="950" dirty="0"/>
-          </a:p>
-        </p:txBody>
-      </p:sp>
-      <p:sp>
-        <p:nvSpPr>
-          <p:cNvPr id="61" name="Text 43"/>
-          <p:cNvSpPr/>
-          <p:nvPr/>
-        </p:nvSpPr>
-        <p:spPr>
-          <a:xfrm>
-            <a:off x="320040" y="4526280"/>
-            <a:ext cx="5212080" cy="274320"/>
-          </a:xfrm>
-          <a:prstGeom prst="rect">
-            <a:avLst/>
-          </a:prstGeom>
-          <a:noFill/>
-          <a:ln/>
-        </p:spPr>
-        <p:txBody>
-          <a:bodyPr wrap="square" lIns="0" tIns="0" rIns="0" bIns="0" rtlCol="0" anchor="ctr"/>
-          <a:lstStyle/>
-          <a:p>
-            <a:pPr algn="l" indent="0" marL="0">
-              <a:buNone/>
-            </a:pPr>
-            <a:r>
-              <a:rPr lang="en-US" sz="1050" dirty="0">
-                <a:solidFill>
-                  <a:srgbClr val="8D6E63"/>
-                </a:solidFill>
-                <a:latin typeface="Zen Maru Gothic" pitchFamily="34" charset="0"/>
-                <a:ea typeface="Zen Maru Gothic" pitchFamily="34" charset="-122"/>
-                <a:cs typeface="Zen Maru Gothic" pitchFamily="34" charset="-120"/>
-              </a:rPr>
-              <a:t>※ うまくいかなかったときの写真を、作っている途中で撮っておくのがポイント</a:t>
-            </a:r>
-            <a:endParaRPr lang="en-US" sz="1050" dirty="0"/>
           </a:p>
         </p:txBody>
       </p:sp>
